--- a/public/downloads/three-kingdoms/lesson-04-teaching.pptx
+++ b/public/downloads/three-kingdoms/lesson-04-teaching.pptx
@@ -15621,7 +15621,7 @@
                 </a:solidFill>
                 <a:latin typeface="S-Core Dream"/>
               </a:rPr>
-              <a:t>웹앱: 수업 사이트 → 삼국시대 → 4차시 → ‘활동지 수업’ 탭 (로그인 없이 모둠만 선택)</a:t>
+              <a:t>활동 화면: 수업 사이트 → 삼국시대 → 4차시 → ‘활동지 수업’ 탭 (로그인 없이 모둠만 선택)</a:t>
             </a:r>
           </a:p>
         </p:txBody>
